--- a/outputs/presentation-theme-actual-tests/jk-theme-custom-4x3.pptx
+++ b/outputs/presentation-theme-actual-tests/jk-theme-custom-4x3.pptx
@@ -2,13 +2,13 @@
 <file path=ppt/presentation.xml><?xml version="1.0" encoding="utf-8"?>
 <p:presentation xmlns:p="http://schemas.openxmlformats.org/presentationml/2006/main">
   <p:sldMasterIdLst>
-    <p:sldMasterId xmlns:r="http://schemas.openxmlformats.org/officeDocument/2006/relationships" id="2147483648" r:id="Rcf9b34ba94a9480c"/>
+    <p:sldMasterId xmlns:r="http://schemas.openxmlformats.org/officeDocument/2006/relationships" id="2147483648" r:id="Re6da2bceafca44ee"/>
   </p:sldMasterIdLst>
   <p:notesMasterIdLst>
-    <p:notesMasterId xmlns:r="http://schemas.openxmlformats.org/officeDocument/2006/relationships" r:id="R5bab036d5a1b47ce"/>
+    <p:notesMasterId xmlns:r="http://schemas.openxmlformats.org/officeDocument/2006/relationships" r:id="R2fd041a1a5854fd6"/>
   </p:notesMasterIdLst>
   <p:sldIdLst>
-    <p:sldId xmlns:r="http://schemas.openxmlformats.org/officeDocument/2006/relationships" id="256" r:id="Rb5722c7ec3e548f8"/>
+    <p:sldId xmlns:r="http://schemas.openxmlformats.org/officeDocument/2006/relationships" id="256" r:id="R09215ad6f68348a2"/>
   </p:sldIdLst>
   <p:sldSz cx="9753600" cy="7315200"/>
   <p:notesSz cx="6858000" cy="9144000"/>
@@ -601,7 +601,7 @@
   </p:cSld>
   <p:clrMap bg1="lt1" tx1="dk1" bg2="lt2" tx2="dk2" accent1="accent1" accent2="accent2" accent3="accent3" accent4="accent4" accent5="accent5" accent6="accent6" hlink="hlink" folHlink="folHlink"/>
   <p:sldLayoutIdLst>
-    <p:sldLayoutId xmlns:r="http://schemas.openxmlformats.org/officeDocument/2006/relationships" id="2147483649" r:id="R0761a2333e774f9f"/>
+    <p:sldLayoutId xmlns:r="http://schemas.openxmlformats.org/officeDocument/2006/relationships" id="2147483649" r:id="Rbaf06ec03f7e4fc9"/>
   </p:sldLayoutIdLst>
   <p:txStyles>
     <p:titleStyle>
@@ -1152,7 +1152,7 @@
           <p:cNvPr id="1" name="judgmentkit-title-block-eyebrow">
             <a:extLst xmlns:a="http://schemas.openxmlformats.org/drawingml/2006/main">
               <a:ext uri="{FF2B5EF4-FFF2-40B4-BE49-F238E27FC236}">
-                <a16:creationId xmlns:a16="http://schemas.microsoft.com/office/drawing/2014/main" id="{606C4EC6-FCBD-4928-9CBC-FCE82BDCCE96}"/>
+                <a16:creationId xmlns:a16="http://schemas.microsoft.com/office/drawing/2014/main" id="{D6F6354D-D760-4736-B642-38E900BFF9EC}"/>
               </a:ext>
             </a:extLst>
           </p:cNvPr>
@@ -1192,7 +1192,7 @@
           <p:cNvPr id="2" name="judgmentkit-title-block-title">
             <a:extLst xmlns:a="http://schemas.openxmlformats.org/drawingml/2006/main">
               <a:ext uri="{FF2B5EF4-FFF2-40B4-BE49-F238E27FC236}">
-                <a16:creationId xmlns:a16="http://schemas.microsoft.com/office/drawing/2014/main" id="{BA576CB5-A087-4AE1-A3DE-74D52104C300}"/>
+                <a16:creationId xmlns:a16="http://schemas.microsoft.com/office/drawing/2014/main" id="{2E351F6A-EF22-4BE3-BF54-5EF92D45BAE5}"/>
               </a:ext>
             </a:extLst>
           </p:cNvPr>
@@ -1232,7 +1232,7 @@
           <p:cNvPr id="3" name="judgmentkit-title-block-subtitle">
             <a:extLst xmlns:a="http://schemas.openxmlformats.org/drawingml/2006/main">
               <a:ext uri="{FF2B5EF4-FFF2-40B4-BE49-F238E27FC236}">
-                <a16:creationId xmlns:a16="http://schemas.microsoft.com/office/drawing/2014/main" id="{F497C5DA-968F-4500-A365-9B64BEE1C0CF}"/>
+                <a16:creationId xmlns:a16="http://schemas.microsoft.com/office/drawing/2014/main" id="{1987D2D9-FFE6-49FC-B831-02CCF1C43E59}"/>
               </a:ext>
             </a:extLst>
           </p:cNvPr>
@@ -1272,7 +1272,7 @@
           <p:cNvPr id="4" name="judgmentkit-metric-tile-surface">
             <a:extLst xmlns:a="http://schemas.openxmlformats.org/drawingml/2006/main">
               <a:ext uri="{FF2B5EF4-FFF2-40B4-BE49-F238E27FC236}">
-                <a16:creationId xmlns:a16="http://schemas.microsoft.com/office/drawing/2014/main" id="{35257707-F92D-406B-873E-89BB105EA5CF}"/>
+                <a16:creationId xmlns:a16="http://schemas.microsoft.com/office/drawing/2014/main" id="{BA1F22E3-5B71-4419-8549-4F5BB0A3453F}"/>
               </a:ext>
             </a:extLst>
           </p:cNvPr>
@@ -1307,7 +1307,7 @@
           <p:cNvPr id="5" name="judgmentkit-metric-tile-label">
             <a:extLst xmlns:a="http://schemas.openxmlformats.org/drawingml/2006/main">
               <a:ext uri="{FF2B5EF4-FFF2-40B4-BE49-F238E27FC236}">
-                <a16:creationId xmlns:a16="http://schemas.microsoft.com/office/drawing/2014/main" id="{CC8E3976-97A2-447B-85DD-2A4C06EF709F}"/>
+                <a16:creationId xmlns:a16="http://schemas.microsoft.com/office/drawing/2014/main" id="{E806D03E-A380-4F94-8D3B-09FF5D51B44F}"/>
               </a:ext>
             </a:extLst>
           </p:cNvPr>
@@ -1347,7 +1347,7 @@
           <p:cNvPr id="6" name="judgmentkit-metric-tile-value">
             <a:extLst xmlns:a="http://schemas.openxmlformats.org/drawingml/2006/main">
               <a:ext uri="{FF2B5EF4-FFF2-40B4-BE49-F238E27FC236}">
-                <a16:creationId xmlns:a16="http://schemas.microsoft.com/office/drawing/2014/main" id="{803D4DB1-4575-48E3-8C83-71B1F5D52873}"/>
+                <a16:creationId xmlns:a16="http://schemas.microsoft.com/office/drawing/2014/main" id="{2448672C-4928-4994-A950-8535BE29CA83}"/>
               </a:ext>
             </a:extLst>
           </p:cNvPr>
@@ -1387,7 +1387,7 @@
           <p:cNvPr id="7" name="judgmentkit-metric-tile-detail">
             <a:extLst xmlns:a="http://schemas.openxmlformats.org/drawingml/2006/main">
               <a:ext uri="{FF2B5EF4-FFF2-40B4-BE49-F238E27FC236}">
-                <a16:creationId xmlns:a16="http://schemas.microsoft.com/office/drawing/2014/main" id="{731DE276-5343-45BC-9376-8D1190B2871F}"/>
+                <a16:creationId xmlns:a16="http://schemas.microsoft.com/office/drawing/2014/main" id="{43AD7768-3A16-494D-986F-E809C4F64B1D}"/>
               </a:ext>
             </a:extLst>
           </p:cNvPr>
@@ -1427,7 +1427,7 @@
           <p:cNvPr id="8" name="judgmentkit-metric-tile-surface">
             <a:extLst xmlns:a="http://schemas.openxmlformats.org/drawingml/2006/main">
               <a:ext uri="{FF2B5EF4-FFF2-40B4-BE49-F238E27FC236}">
-                <a16:creationId xmlns:a16="http://schemas.microsoft.com/office/drawing/2014/main" id="{CD133DD0-3B02-4FC0-B33C-07D18121D6E8}"/>
+                <a16:creationId xmlns:a16="http://schemas.microsoft.com/office/drawing/2014/main" id="{427A76F1-533E-49FD-A841-4C096A68615B}"/>
               </a:ext>
             </a:extLst>
           </p:cNvPr>
@@ -1462,7 +1462,7 @@
           <p:cNvPr id="9" name="judgmentkit-metric-tile-label">
             <a:extLst xmlns:a="http://schemas.openxmlformats.org/drawingml/2006/main">
               <a:ext uri="{FF2B5EF4-FFF2-40B4-BE49-F238E27FC236}">
-                <a16:creationId xmlns:a16="http://schemas.microsoft.com/office/drawing/2014/main" id="{279D13E8-902C-4D65-944D-FDA54677D8D6}"/>
+                <a16:creationId xmlns:a16="http://schemas.microsoft.com/office/drawing/2014/main" id="{50AA5B0E-2144-4BED-B800-81292084EBA8}"/>
               </a:ext>
             </a:extLst>
           </p:cNvPr>
@@ -1502,7 +1502,7 @@
           <p:cNvPr id="10" name="judgmentkit-metric-tile-value">
             <a:extLst xmlns:a="http://schemas.openxmlformats.org/drawingml/2006/main">
               <a:ext uri="{FF2B5EF4-FFF2-40B4-BE49-F238E27FC236}">
-                <a16:creationId xmlns:a16="http://schemas.microsoft.com/office/drawing/2014/main" id="{4B5B0D34-0456-4168-BAA9-3E6AFD38A898}"/>
+                <a16:creationId xmlns:a16="http://schemas.microsoft.com/office/drawing/2014/main" id="{5720E9EA-5A43-461D-AF1F-513A484B7716}"/>
               </a:ext>
             </a:extLst>
           </p:cNvPr>
@@ -1542,7 +1542,7 @@
           <p:cNvPr id="11" name="judgmentkit-metric-tile-detail">
             <a:extLst xmlns:a="http://schemas.openxmlformats.org/drawingml/2006/main">
               <a:ext uri="{FF2B5EF4-FFF2-40B4-BE49-F238E27FC236}">
-                <a16:creationId xmlns:a16="http://schemas.microsoft.com/office/drawing/2014/main" id="{6E689B40-7264-49B1-A7B5-B006785CADC3}"/>
+                <a16:creationId xmlns:a16="http://schemas.microsoft.com/office/drawing/2014/main" id="{6C375D7D-6BE3-4873-9B72-46BFA286EE93}"/>
               </a:ext>
             </a:extLst>
           </p:cNvPr>
@@ -1582,7 +1582,7 @@
           <p:cNvPr id="12" name="judgmentkit-metric-tile-surface">
             <a:extLst xmlns:a="http://schemas.openxmlformats.org/drawingml/2006/main">
               <a:ext uri="{FF2B5EF4-FFF2-40B4-BE49-F238E27FC236}">
-                <a16:creationId xmlns:a16="http://schemas.microsoft.com/office/drawing/2014/main" id="{653CF156-AAA9-477F-BE22-D5B4109413A1}"/>
+                <a16:creationId xmlns:a16="http://schemas.microsoft.com/office/drawing/2014/main" id="{1A20E9D4-CF24-4F3F-90DB-7096D2C67166}"/>
               </a:ext>
             </a:extLst>
           </p:cNvPr>
@@ -1617,7 +1617,7 @@
           <p:cNvPr id="13" name="judgmentkit-metric-tile-label">
             <a:extLst xmlns:a="http://schemas.openxmlformats.org/drawingml/2006/main">
               <a:ext uri="{FF2B5EF4-FFF2-40B4-BE49-F238E27FC236}">
-                <a16:creationId xmlns:a16="http://schemas.microsoft.com/office/drawing/2014/main" id="{A8FF3E4A-0D95-47CA-BFDA-BD17D59191B0}"/>
+                <a16:creationId xmlns:a16="http://schemas.microsoft.com/office/drawing/2014/main" id="{7F53CFDA-6DA4-4CF6-99F4-0DB3A8A6C043}"/>
               </a:ext>
             </a:extLst>
           </p:cNvPr>
@@ -1657,7 +1657,7 @@
           <p:cNvPr id="14" name="judgmentkit-metric-tile-value">
             <a:extLst xmlns:a="http://schemas.openxmlformats.org/drawingml/2006/main">
               <a:ext uri="{FF2B5EF4-FFF2-40B4-BE49-F238E27FC236}">
-                <a16:creationId xmlns:a16="http://schemas.microsoft.com/office/drawing/2014/main" id="{86E18ADB-4BFF-4422-8DDF-94B7B0C92A0E}"/>
+                <a16:creationId xmlns:a16="http://schemas.microsoft.com/office/drawing/2014/main" id="{F634107A-45BE-4984-9771-68FE388545EF}"/>
               </a:ext>
             </a:extLst>
           </p:cNvPr>
@@ -1697,7 +1697,7 @@
           <p:cNvPr id="15" name="judgmentkit-metric-tile-detail">
             <a:extLst xmlns:a="http://schemas.openxmlformats.org/drawingml/2006/main">
               <a:ext uri="{FF2B5EF4-FFF2-40B4-BE49-F238E27FC236}">
-                <a16:creationId xmlns:a16="http://schemas.microsoft.com/office/drawing/2014/main" id="{FD8C19B9-E4CA-41CB-BBCD-3EE7707879AD}"/>
+                <a16:creationId xmlns:a16="http://schemas.microsoft.com/office/drawing/2014/main" id="{39D646D8-6A69-4924-921F-CD5C8AE5D99B}"/>
               </a:ext>
             </a:extLst>
           </p:cNvPr>
@@ -1737,7 +1737,7 @@
           <p:cNvPr id="16" name="judgmentkit-evidence-panel-surface">
             <a:extLst xmlns:a="http://schemas.openxmlformats.org/drawingml/2006/main">
               <a:ext uri="{FF2B5EF4-FFF2-40B4-BE49-F238E27FC236}">
-                <a16:creationId xmlns:a16="http://schemas.microsoft.com/office/drawing/2014/main" id="{DCBFC71A-CFEE-4FFA-979C-796214796414}"/>
+                <a16:creationId xmlns:a16="http://schemas.microsoft.com/office/drawing/2014/main" id="{BB5FFCB9-0D03-4931-B6DB-991C68BAE380}"/>
               </a:ext>
             </a:extLst>
           </p:cNvPr>
@@ -1772,7 +1772,7 @@
           <p:cNvPr id="17" name="judgmentkit-evidence-panel-title">
             <a:extLst xmlns:a="http://schemas.openxmlformats.org/drawingml/2006/main">
               <a:ext uri="{FF2B5EF4-FFF2-40B4-BE49-F238E27FC236}">
-                <a16:creationId xmlns:a16="http://schemas.microsoft.com/office/drawing/2014/main" id="{86909472-E277-477C-88F6-3D70FFCC5030}"/>
+                <a16:creationId xmlns:a16="http://schemas.microsoft.com/office/drawing/2014/main" id="{32487F9F-BC69-413A-AF96-39E2C66A9935}"/>
               </a:ext>
             </a:extLst>
           </p:cNvPr>
@@ -1812,7 +1812,7 @@
           <p:cNvPr id="18" name="judgmentkit-evidence-panel-body">
             <a:extLst xmlns:a="http://schemas.openxmlformats.org/drawingml/2006/main">
               <a:ext uri="{FF2B5EF4-FFF2-40B4-BE49-F238E27FC236}">
-                <a16:creationId xmlns:a16="http://schemas.microsoft.com/office/drawing/2014/main" id="{58B250A4-20EA-4F8F-B2B9-35AAD62CD162}"/>
+                <a16:creationId xmlns:a16="http://schemas.microsoft.com/office/drawing/2014/main" id="{5C6C515C-30BF-456A-A0C6-A069C9B5169A}"/>
               </a:ext>
             </a:extLst>
           </p:cNvPr>
@@ -1874,7 +1874,7 @@
     </p:spTree>
     <p:extLst>
       <p:ext uri="{BB962C8B-B14F-4D97-AF65-F5344CB8AC3E}">
-        <p14:creationId xmlns:p14="http://schemas.microsoft.com/office/powerpoint/2010/main" val="1976996250"/>
+        <p14:creationId xmlns:p14="http://schemas.microsoft.com/office/powerpoint/2010/main" val="320772414"/>
       </p:ext>
     </p:extLst>
   </p:cSld>

--- a/outputs/presentation-theme-actual-tests/jk-theme-custom-4x3.pptx
+++ b/outputs/presentation-theme-actual-tests/jk-theme-custom-4x3.pptx
@@ -2,13 +2,13 @@
 <file path=ppt/presentation.xml><?xml version="1.0" encoding="utf-8"?>
 <p:presentation xmlns:p="http://schemas.openxmlformats.org/presentationml/2006/main">
   <p:sldMasterIdLst>
-    <p:sldMasterId xmlns:r="http://schemas.openxmlformats.org/officeDocument/2006/relationships" id="2147483648" r:id="Re6da2bceafca44ee"/>
+    <p:sldMasterId xmlns:r="http://schemas.openxmlformats.org/officeDocument/2006/relationships" id="2147483648" r:id="R1358816dbbee441c"/>
   </p:sldMasterIdLst>
   <p:notesMasterIdLst>
-    <p:notesMasterId xmlns:r="http://schemas.openxmlformats.org/officeDocument/2006/relationships" r:id="R2fd041a1a5854fd6"/>
+    <p:notesMasterId xmlns:r="http://schemas.openxmlformats.org/officeDocument/2006/relationships" r:id="R6a73e691426d4382"/>
   </p:notesMasterIdLst>
   <p:sldIdLst>
-    <p:sldId xmlns:r="http://schemas.openxmlformats.org/officeDocument/2006/relationships" id="256" r:id="R09215ad6f68348a2"/>
+    <p:sldId xmlns:r="http://schemas.openxmlformats.org/officeDocument/2006/relationships" id="256" r:id="R1a7812c3d0744e33"/>
   </p:sldIdLst>
   <p:sldSz cx="9753600" cy="7315200"/>
   <p:notesSz cx="6858000" cy="9144000"/>
@@ -260,19 +260,19 @@
         <a:srgbClr val="171717"/>
       </a:dk1>
       <a:lt1>
-        <a:srgbClr val="F8F7F2"/>
+        <a:srgbClr val="FFFFFF"/>
       </a:lt1>
       <a:dk2>
-        <a:srgbClr val="61615C"/>
+        <a:srgbClr val="666666"/>
       </a:dk2>
       <a:lt2>
-        <a:srgbClr val="FFFFFF"/>
+        <a:srgbClr val="F4F4F4"/>
       </a:lt2>
       <a:accent1>
-        <a:srgbClr val="245F73"/>
+        <a:srgbClr val="156082"/>
       </a:accent1>
       <a:accent2>
-        <a:srgbClr val="23615F"/>
+        <a:srgbClr val="467886"/>
       </a:accent2>
       <a:accent3>
         <a:srgbClr val="2E6B48"/>
@@ -284,13 +284,13 @@
         <a:srgbClr val="8F342F"/>
       </a:accent5>
       <a:accent6>
-        <a:srgbClr val="D7D3C8"/>
+        <a:srgbClr val="D9D9D9"/>
       </a:accent6>
       <a:hlink>
-        <a:srgbClr val="245F73"/>
+        <a:srgbClr val="156082"/>
       </a:hlink>
       <a:folHlink>
-        <a:srgbClr val="23615F"/>
+        <a:srgbClr val="467886"/>
       </a:folHlink>
     </a:clrScheme>
     <a:fontScheme name="Office">
@@ -601,7 +601,7 @@
   </p:cSld>
   <p:clrMap bg1="lt1" tx1="dk1" bg2="lt2" tx2="dk2" accent1="accent1" accent2="accent2" accent3="accent3" accent4="accent4" accent5="accent5" accent6="accent6" hlink="hlink" folHlink="folHlink"/>
   <p:sldLayoutIdLst>
-    <p:sldLayoutId xmlns:r="http://schemas.openxmlformats.org/officeDocument/2006/relationships" id="2147483649" r:id="Rbaf06ec03f7e4fc9"/>
+    <p:sldLayoutId xmlns:r="http://schemas.openxmlformats.org/officeDocument/2006/relationships" id="2147483649" r:id="R7e1287d708c74af4"/>
   </p:sldLayoutIdLst>
   <p:txStyles>
     <p:titleStyle>
@@ -891,19 +891,19 @@
         <a:srgbClr val="171717"/>
       </a:dk1>
       <a:lt1>
-        <a:srgbClr val="F8F7F2"/>
+        <a:srgbClr val="FFFFFF"/>
       </a:lt1>
       <a:dk2>
-        <a:srgbClr val="61615C"/>
+        <a:srgbClr val="666666"/>
       </a:dk2>
       <a:lt2>
-        <a:srgbClr val="FFFFFF"/>
+        <a:srgbClr val="F4F4F4"/>
       </a:lt2>
       <a:accent1>
-        <a:srgbClr val="245F73"/>
+        <a:srgbClr val="156082"/>
       </a:accent1>
       <a:accent2>
-        <a:srgbClr val="23615F"/>
+        <a:srgbClr val="467886"/>
       </a:accent2>
       <a:accent3>
         <a:srgbClr val="2E6B48"/>
@@ -915,13 +915,13 @@
         <a:srgbClr val="8F342F"/>
       </a:accent5>
       <a:accent6>
-        <a:srgbClr val="D7D3C8"/>
+        <a:srgbClr val="D9D9D9"/>
       </a:accent6>
       <a:hlink>
-        <a:srgbClr val="245F73"/>
+        <a:srgbClr val="156082"/>
       </a:hlink>
       <a:folHlink>
-        <a:srgbClr val="23615F"/>
+        <a:srgbClr val="467886"/>
       </a:folHlink>
     </a:clrScheme>
     <a:fontScheme name="Office">
@@ -1152,7 +1152,7 @@
           <p:cNvPr id="1" name="judgmentkit-title-block-eyebrow">
             <a:extLst xmlns:a="http://schemas.openxmlformats.org/drawingml/2006/main">
               <a:ext uri="{FF2B5EF4-FFF2-40B4-BE49-F238E27FC236}">
-                <a16:creationId xmlns:a16="http://schemas.microsoft.com/office/drawing/2014/main" id="{D6F6354D-D760-4736-B642-38E900BFF9EC}"/>
+                <a16:creationId xmlns:a16="http://schemas.microsoft.com/office/drawing/2014/main" id="{986B193B-BE16-4903-B668-8F10C1D2304F}"/>
               </a:ext>
             </a:extLst>
           </p:cNvPr>
@@ -1192,7 +1192,7 @@
           <p:cNvPr id="2" name="judgmentkit-title-block-title">
             <a:extLst xmlns:a="http://schemas.openxmlformats.org/drawingml/2006/main">
               <a:ext uri="{FF2B5EF4-FFF2-40B4-BE49-F238E27FC236}">
-                <a16:creationId xmlns:a16="http://schemas.microsoft.com/office/drawing/2014/main" id="{2E351F6A-EF22-4BE3-BF54-5EF92D45BAE5}"/>
+                <a16:creationId xmlns:a16="http://schemas.microsoft.com/office/drawing/2014/main" id="{840DC8A9-3B09-4F03-A638-C99BC643D1B6}"/>
               </a:ext>
             </a:extLst>
           </p:cNvPr>
@@ -1232,7 +1232,7 @@
           <p:cNvPr id="3" name="judgmentkit-title-block-subtitle">
             <a:extLst xmlns:a="http://schemas.openxmlformats.org/drawingml/2006/main">
               <a:ext uri="{FF2B5EF4-FFF2-40B4-BE49-F238E27FC236}">
-                <a16:creationId xmlns:a16="http://schemas.microsoft.com/office/drawing/2014/main" id="{1987D2D9-FFE6-49FC-B831-02CCF1C43E59}"/>
+                <a16:creationId xmlns:a16="http://schemas.microsoft.com/office/drawing/2014/main" id="{8BFDAEDA-3B9F-4743-9FE6-6E614DFAA150}"/>
               </a:ext>
             </a:extLst>
           </p:cNvPr>
@@ -1272,7 +1272,7 @@
           <p:cNvPr id="4" name="judgmentkit-metric-tile-surface">
             <a:extLst xmlns:a="http://schemas.openxmlformats.org/drawingml/2006/main">
               <a:ext uri="{FF2B5EF4-FFF2-40B4-BE49-F238E27FC236}">
-                <a16:creationId xmlns:a16="http://schemas.microsoft.com/office/drawing/2014/main" id="{BA1F22E3-5B71-4419-8549-4F5BB0A3453F}"/>
+                <a16:creationId xmlns:a16="http://schemas.microsoft.com/office/drawing/2014/main" id="{6F2B24C4-DC65-4007-8F7C-EE38EA6424E9}"/>
               </a:ext>
             </a:extLst>
           </p:cNvPr>
@@ -1307,7 +1307,7 @@
           <p:cNvPr id="5" name="judgmentkit-metric-tile-label">
             <a:extLst xmlns:a="http://schemas.openxmlformats.org/drawingml/2006/main">
               <a:ext uri="{FF2B5EF4-FFF2-40B4-BE49-F238E27FC236}">
-                <a16:creationId xmlns:a16="http://schemas.microsoft.com/office/drawing/2014/main" id="{E806D03E-A380-4F94-8D3B-09FF5D51B44F}"/>
+                <a16:creationId xmlns:a16="http://schemas.microsoft.com/office/drawing/2014/main" id="{6E5E6AC1-7CBC-42AE-A7E0-8546A1CE9DA6}"/>
               </a:ext>
             </a:extLst>
           </p:cNvPr>
@@ -1347,7 +1347,7 @@
           <p:cNvPr id="6" name="judgmentkit-metric-tile-value">
             <a:extLst xmlns:a="http://schemas.openxmlformats.org/drawingml/2006/main">
               <a:ext uri="{FF2B5EF4-FFF2-40B4-BE49-F238E27FC236}">
-                <a16:creationId xmlns:a16="http://schemas.microsoft.com/office/drawing/2014/main" id="{2448672C-4928-4994-A950-8535BE29CA83}"/>
+                <a16:creationId xmlns:a16="http://schemas.microsoft.com/office/drawing/2014/main" id="{39CF0A16-7B55-4C91-B036-4D407515790B}"/>
               </a:ext>
             </a:extLst>
           </p:cNvPr>
@@ -1387,7 +1387,7 @@
           <p:cNvPr id="7" name="judgmentkit-metric-tile-detail">
             <a:extLst xmlns:a="http://schemas.openxmlformats.org/drawingml/2006/main">
               <a:ext uri="{FF2B5EF4-FFF2-40B4-BE49-F238E27FC236}">
-                <a16:creationId xmlns:a16="http://schemas.microsoft.com/office/drawing/2014/main" id="{43AD7768-3A16-494D-986F-E809C4F64B1D}"/>
+                <a16:creationId xmlns:a16="http://schemas.microsoft.com/office/drawing/2014/main" id="{B5BDC038-005D-4D8A-88C9-94368EDF1990}"/>
               </a:ext>
             </a:extLst>
           </p:cNvPr>
@@ -1427,7 +1427,7 @@
           <p:cNvPr id="8" name="judgmentkit-metric-tile-surface">
             <a:extLst xmlns:a="http://schemas.openxmlformats.org/drawingml/2006/main">
               <a:ext uri="{FF2B5EF4-FFF2-40B4-BE49-F238E27FC236}">
-                <a16:creationId xmlns:a16="http://schemas.microsoft.com/office/drawing/2014/main" id="{427A76F1-533E-49FD-A841-4C096A68615B}"/>
+                <a16:creationId xmlns:a16="http://schemas.microsoft.com/office/drawing/2014/main" id="{D07A3148-3A3D-4A22-9F6A-E01FB1558C2F}"/>
               </a:ext>
             </a:extLst>
           </p:cNvPr>
@@ -1462,7 +1462,7 @@
           <p:cNvPr id="9" name="judgmentkit-metric-tile-label">
             <a:extLst xmlns:a="http://schemas.openxmlformats.org/drawingml/2006/main">
               <a:ext uri="{FF2B5EF4-FFF2-40B4-BE49-F238E27FC236}">
-                <a16:creationId xmlns:a16="http://schemas.microsoft.com/office/drawing/2014/main" id="{50AA5B0E-2144-4BED-B800-81292084EBA8}"/>
+                <a16:creationId xmlns:a16="http://schemas.microsoft.com/office/drawing/2014/main" id="{9A070C93-F8E6-4E2B-948E-BCD25AADF1FE}"/>
               </a:ext>
             </a:extLst>
           </p:cNvPr>
@@ -1502,7 +1502,7 @@
           <p:cNvPr id="10" name="judgmentkit-metric-tile-value">
             <a:extLst xmlns:a="http://schemas.openxmlformats.org/drawingml/2006/main">
               <a:ext uri="{FF2B5EF4-FFF2-40B4-BE49-F238E27FC236}">
-                <a16:creationId xmlns:a16="http://schemas.microsoft.com/office/drawing/2014/main" id="{5720E9EA-5A43-461D-AF1F-513A484B7716}"/>
+                <a16:creationId xmlns:a16="http://schemas.microsoft.com/office/drawing/2014/main" id="{64D937F0-0145-4F98-A7F8-1D9BD8AF8336}"/>
               </a:ext>
             </a:extLst>
           </p:cNvPr>
@@ -1542,7 +1542,7 @@
           <p:cNvPr id="11" name="judgmentkit-metric-tile-detail">
             <a:extLst xmlns:a="http://schemas.openxmlformats.org/drawingml/2006/main">
               <a:ext uri="{FF2B5EF4-FFF2-40B4-BE49-F238E27FC236}">
-                <a16:creationId xmlns:a16="http://schemas.microsoft.com/office/drawing/2014/main" id="{6C375D7D-6BE3-4873-9B72-46BFA286EE93}"/>
+                <a16:creationId xmlns:a16="http://schemas.microsoft.com/office/drawing/2014/main" id="{959642AA-043A-49BE-91D2-426035CB926D}"/>
               </a:ext>
             </a:extLst>
           </p:cNvPr>
@@ -1582,7 +1582,7 @@
           <p:cNvPr id="12" name="judgmentkit-metric-tile-surface">
             <a:extLst xmlns:a="http://schemas.openxmlformats.org/drawingml/2006/main">
               <a:ext uri="{FF2B5EF4-FFF2-40B4-BE49-F238E27FC236}">
-                <a16:creationId xmlns:a16="http://schemas.microsoft.com/office/drawing/2014/main" id="{1A20E9D4-CF24-4F3F-90DB-7096D2C67166}"/>
+                <a16:creationId xmlns:a16="http://schemas.microsoft.com/office/drawing/2014/main" id="{462FA16A-B42D-4F9A-8DCD-025BE6AF5518}"/>
               </a:ext>
             </a:extLst>
           </p:cNvPr>
@@ -1617,7 +1617,7 @@
           <p:cNvPr id="13" name="judgmentkit-metric-tile-label">
             <a:extLst xmlns:a="http://schemas.openxmlformats.org/drawingml/2006/main">
               <a:ext uri="{FF2B5EF4-FFF2-40B4-BE49-F238E27FC236}">
-                <a16:creationId xmlns:a16="http://schemas.microsoft.com/office/drawing/2014/main" id="{7F53CFDA-6DA4-4CF6-99F4-0DB3A8A6C043}"/>
+                <a16:creationId xmlns:a16="http://schemas.microsoft.com/office/drawing/2014/main" id="{92253B77-2158-4CA3-BE0A-7944F8A9590A}"/>
               </a:ext>
             </a:extLst>
           </p:cNvPr>
@@ -1657,7 +1657,7 @@
           <p:cNvPr id="14" name="judgmentkit-metric-tile-value">
             <a:extLst xmlns:a="http://schemas.openxmlformats.org/drawingml/2006/main">
               <a:ext uri="{FF2B5EF4-FFF2-40B4-BE49-F238E27FC236}">
-                <a16:creationId xmlns:a16="http://schemas.microsoft.com/office/drawing/2014/main" id="{F634107A-45BE-4984-9771-68FE388545EF}"/>
+                <a16:creationId xmlns:a16="http://schemas.microsoft.com/office/drawing/2014/main" id="{D5C85EA9-FABA-4816-9B69-816F0CF15B33}"/>
               </a:ext>
             </a:extLst>
           </p:cNvPr>
@@ -1697,7 +1697,7 @@
           <p:cNvPr id="15" name="judgmentkit-metric-tile-detail">
             <a:extLst xmlns:a="http://schemas.openxmlformats.org/drawingml/2006/main">
               <a:ext uri="{FF2B5EF4-FFF2-40B4-BE49-F238E27FC236}">
-                <a16:creationId xmlns:a16="http://schemas.microsoft.com/office/drawing/2014/main" id="{39D646D8-6A69-4924-921F-CD5C8AE5D99B}"/>
+                <a16:creationId xmlns:a16="http://schemas.microsoft.com/office/drawing/2014/main" id="{A94FA5CD-6D79-4499-BDD9-8FE9583FB79E}"/>
               </a:ext>
             </a:extLst>
           </p:cNvPr>
@@ -1737,7 +1737,7 @@
           <p:cNvPr id="16" name="judgmentkit-evidence-panel-surface">
             <a:extLst xmlns:a="http://schemas.openxmlformats.org/drawingml/2006/main">
               <a:ext uri="{FF2B5EF4-FFF2-40B4-BE49-F238E27FC236}">
-                <a16:creationId xmlns:a16="http://schemas.microsoft.com/office/drawing/2014/main" id="{BB5FFCB9-0D03-4931-B6DB-991C68BAE380}"/>
+                <a16:creationId xmlns:a16="http://schemas.microsoft.com/office/drawing/2014/main" id="{A8FB7218-461E-427F-8408-32B8DC53FBA3}"/>
               </a:ext>
             </a:extLst>
           </p:cNvPr>
@@ -1772,7 +1772,7 @@
           <p:cNvPr id="17" name="judgmentkit-evidence-panel-title">
             <a:extLst xmlns:a="http://schemas.openxmlformats.org/drawingml/2006/main">
               <a:ext uri="{FF2B5EF4-FFF2-40B4-BE49-F238E27FC236}">
-                <a16:creationId xmlns:a16="http://schemas.microsoft.com/office/drawing/2014/main" id="{32487F9F-BC69-413A-AF96-39E2C66A9935}"/>
+                <a16:creationId xmlns:a16="http://schemas.microsoft.com/office/drawing/2014/main" id="{E489EE31-AC54-48D2-8550-3F2B1E36082F}"/>
               </a:ext>
             </a:extLst>
           </p:cNvPr>
@@ -1812,7 +1812,7 @@
           <p:cNvPr id="18" name="judgmentkit-evidence-panel-body">
             <a:extLst xmlns:a="http://schemas.openxmlformats.org/drawingml/2006/main">
               <a:ext uri="{FF2B5EF4-FFF2-40B4-BE49-F238E27FC236}">
-                <a16:creationId xmlns:a16="http://schemas.microsoft.com/office/drawing/2014/main" id="{5C6C515C-30BF-456A-A0C6-A069C9B5169A}"/>
+                <a16:creationId xmlns:a16="http://schemas.microsoft.com/office/drawing/2014/main" id="{76DE2DC1-2253-419F-9C3C-0B346CDD2B22}"/>
               </a:ext>
             </a:extLst>
           </p:cNvPr>
@@ -1874,7 +1874,7 @@
     </p:spTree>
     <p:extLst>
       <p:ext uri="{BB962C8B-B14F-4D97-AF65-F5344CB8AC3E}">
-        <p14:creationId xmlns:p14="http://schemas.microsoft.com/office/powerpoint/2010/main" val="320772414"/>
+        <p14:creationId xmlns:p14="http://schemas.microsoft.com/office/powerpoint/2010/main" val="612106590"/>
       </p:ext>
     </p:extLst>
   </p:cSld>
@@ -1889,19 +1889,19 @@
         <a:srgbClr val="171717"/>
       </a:dk1>
       <a:lt1>
-        <a:srgbClr val="F8F7F2"/>
+        <a:srgbClr val="FFFFFF"/>
       </a:lt1>
       <a:dk2>
-        <a:srgbClr val="61615C"/>
+        <a:srgbClr val="666666"/>
       </a:dk2>
       <a:lt2>
-        <a:srgbClr val="FFFFFF"/>
+        <a:srgbClr val="F4F4F4"/>
       </a:lt2>
       <a:accent1>
-        <a:srgbClr val="245F73"/>
+        <a:srgbClr val="156082"/>
       </a:accent1>
       <a:accent2>
-        <a:srgbClr val="23615F"/>
+        <a:srgbClr val="467886"/>
       </a:accent2>
       <a:accent3>
         <a:srgbClr val="2E6B48"/>
@@ -1913,13 +1913,13 @@
         <a:srgbClr val="8F342F"/>
       </a:accent5>
       <a:accent6>
-        <a:srgbClr val="D7D3C8"/>
+        <a:srgbClr val="D9D9D9"/>
       </a:accent6>
       <a:hlink>
-        <a:srgbClr val="245F73"/>
+        <a:srgbClr val="156082"/>
       </a:hlink>
       <a:folHlink>
-        <a:srgbClr val="23615F"/>
+        <a:srgbClr val="467886"/>
       </a:folHlink>
     </a:clrScheme>
     <a:fontScheme name="Office">
